--- a/the-law-offices-of-david-p-shapiro/The_Law_Offices_of_David_P_Shapiro_June_11_2026_Proposal.pptx
+++ b/the-law-offices-of-david-p-shapiro/The_Law_Offices_of_David_P_Shapiro_June_11_2026_Proposal.pptx
@@ -4453,7 +4453,7 @@
                 </a:solidFill>
                 <a:latin typeface="Calibri"/>
               </a:rPr>
-              <a:t>Dead domain davidshapiro.com actively loses referral leads</a:t>
+              <a:t>davidshapiro.com leads to a Baltimore attorney — active lead loss</a:t>
             </a:r>
           </a:p>
         </p:txBody>
@@ -5365,7 +5365,7 @@
                 </a:solidFill>
                 <a:latin typeface="Calibri"/>
               </a:rPr>
-              <a:t>Monder Criminal Lawyer Grp</a:t>
+              <a:t>sandiegoduilawyers.com</a:t>
             </a:r>
           </a:p>
         </p:txBody>
@@ -5398,7 +5398,7 @@
                 </a:solidFill>
                 <a:latin typeface="Calibri"/>
               </a:rPr>
-              <a:t>4.8 stars</a:t>
+              <a:t>N/A</a:t>
             </a:r>
           </a:p>
         </p:txBody>
@@ -5431,7 +5431,7 @@
                 </a:solidFill>
                 <a:latin typeface="Calibri"/>
               </a:rPr>
-              <a:t>Active DUI/criminal presence</a:t>
+              <a:t>Dedicated DUI PPC capture funnel</a:t>
             </a:r>
           </a:p>
         </p:txBody>
@@ -9736,7 +9736,7 @@
                 </a:solidFill>
                 <a:latin typeface="Calibri"/>
               </a:rPr>
-              <a:t>Conservative  (~4 cases/mo):</a:t>
+              <a:t>Conservative  (2–3 cases/mo):</a:t>
             </a:r>
           </a:p>
         </p:txBody>
@@ -9769,7 +9769,7 @@
                 </a:solidFill>
                 <a:latin typeface="Calibri"/>
               </a:rPr>
-              <a:t>$16,000 revenue · 2.9× ROAS</a:t>
+              <a:t>$10,000 revenue · 1.8× ROAS</a:t>
             </a:r>
           </a:p>
         </p:txBody>
@@ -9802,7 +9802,7 @@
                 </a:solidFill>
                 <a:latin typeface="Calibri"/>
               </a:rPr>
-              <a:t>Aggressive  (~23 cases/mo):</a:t>
+              <a:t>Aggressive  (12–13 cases/mo):</a:t>
             </a:r>
           </a:p>
         </p:txBody>
@@ -9835,7 +9835,7 @@
                 </a:solidFill>
                 <a:latin typeface="Calibri"/>
               </a:rPr>
-              <a:t>$92,000 revenue · 4.2× ROAS</a:t>
+              <a:t>$52,000 revenue · 2.4× ROAS</a:t>
             </a:r>
           </a:p>
         </p:txBody>
@@ -9979,7 +9979,7 @@
                 </a:solidFill>
                 <a:latin typeface="Calibri"/>
               </a:rPr>
-              <a:t>Dead domain redirect + coaching kickoff</a:t>
+              <a:t>Coaching kickoff + onboarding begins</a:t>
             </a:r>
           </a:p>
         </p:txBody>

--- a/the-law-offices-of-david-p-shapiro/The_Law_Offices_of_David_P_Shapiro_June_11_2026_Proposal.pptx
+++ b/the-law-offices-of-david-p-shapiro/The_Law_Offices_of_David_P_Shapiro_June_11_2026_Proposal.pptx
@@ -3372,7 +3372,7 @@
             <a:avLst/>
           </a:prstGeom>
           <a:solidFill>
-            <a:srgbClr val="D97706"/>
+            <a:srgbClr val="C0392B"/>
           </a:solidFill>
           <a:ln>
             <a:solidFill>
@@ -3504,11 +3504,11 @@
             <a:r>
               <a:rPr sz="700" b="1" i="0">
                 <a:solidFill>
-                  <a:srgbClr val="D97706"/>
-                </a:solidFill>
-                <a:latin typeface="Calibri"/>
-              </a:rPr>
-              <a:t>IN PROGRESS</a:t>
+                  <a:srgbClr val="C0392B"/>
+                </a:solidFill>
+                <a:latin typeface="Calibri"/>
+              </a:rPr>
+              <a:t>CRITICAL</a:t>
             </a:r>
           </a:p>
         </p:txBody>
@@ -3541,7 +3541,7 @@
                 </a:solidFill>
                 <a:latin typeface="Calibri"/>
               </a:rPr>
-              <a:t>No paid ads confirmed</a:t>
+              <a:t>Referrals only; 0 ads</a:t>
             </a:r>
           </a:p>
         </p:txBody>
@@ -3555,6 +3555,384 @@
         <p:spPr>
           <a:xfrm>
             <a:off x="2542032" y="1005840"/>
+            <a:ext cx="804672" cy="164592"/>
+          </a:xfrm>
+          <a:prstGeom prst="rect">
+            <a:avLst/>
+          </a:prstGeom>
+          <a:solidFill>
+            <a:srgbClr val="C0392B"/>
+          </a:solidFill>
+          <a:ln>
+            <a:solidFill>
+              <a:srgbClr val="FFFFFF"/>
+            </a:solidFill>
+          </a:ln>
+        </p:spPr>
+        <p:style>
+          <a:lnRef idx="1">
+            <a:schemeClr val="accent1"/>
+          </a:lnRef>
+          <a:fillRef idx="3">
+            <a:schemeClr val="accent1"/>
+          </a:fillRef>
+          <a:effectRef idx="2">
+            <a:schemeClr val="accent1"/>
+          </a:effectRef>
+          <a:fontRef idx="minor">
+            <a:schemeClr val="lt1"/>
+          </a:fontRef>
+        </p:style>
+        <p:txBody>
+          <a:bodyPr rtlCol="0" anchor="ctr"/>
+          <a:lstStyle/>
+          <a:p>
+            <a:pPr algn="ctr"/>
+          </a:p>
+        </p:txBody>
+      </p:sp>
+      <p:sp>
+        <p:nvSpPr>
+          <p:cNvPr id="15" name="Rectangle 14"/>
+          <p:cNvSpPr/>
+          <p:nvPr/>
+        </p:nvSpPr>
+        <p:spPr>
+          <a:xfrm>
+            <a:off x="2542032" y="1170432"/>
+            <a:ext cx="804672" cy="676656"/>
+          </a:xfrm>
+          <a:prstGeom prst="rect">
+            <a:avLst/>
+          </a:prstGeom>
+          <a:solidFill>
+            <a:srgbClr val="162947"/>
+          </a:solidFill>
+          <a:ln>
+            <a:solidFill>
+              <a:srgbClr val="FFFFFF"/>
+            </a:solidFill>
+          </a:ln>
+        </p:spPr>
+        <p:style>
+          <a:lnRef idx="1">
+            <a:schemeClr val="accent1"/>
+          </a:lnRef>
+          <a:fillRef idx="3">
+            <a:schemeClr val="accent1"/>
+          </a:fillRef>
+          <a:effectRef idx="2">
+            <a:schemeClr val="accent1"/>
+          </a:effectRef>
+          <a:fontRef idx="minor">
+            <a:schemeClr val="lt1"/>
+          </a:fontRef>
+        </p:style>
+        <p:txBody>
+          <a:bodyPr rtlCol="0" anchor="ctr"/>
+          <a:lstStyle/>
+          <a:p>
+            <a:pPr algn="ctr"/>
+          </a:p>
+        </p:txBody>
+      </p:sp>
+      <p:sp>
+        <p:nvSpPr>
+          <p:cNvPr id="16" name="TextBox 15"/>
+          <p:cNvSpPr txBox="1"/>
+          <p:nvPr/>
+        </p:nvSpPr>
+        <p:spPr>
+          <a:xfrm>
+            <a:off x="2596896" y="1188720"/>
+            <a:ext cx="694944" cy="237744"/>
+          </a:xfrm>
+          <a:prstGeom prst="rect">
+            <a:avLst/>
+          </a:prstGeom>
+          <a:noFill/>
+        </p:spPr>
+        <p:txBody>
+          <a:bodyPr wrap="square"/>
+          <a:lstStyle/>
+          <a:p>
+            <a:pPr algn="l"/>
+            <a:r>
+              <a:rPr sz="800" b="1" i="0">
+                <a:solidFill>
+                  <a:srgbClr val="FFFFFF"/>
+                </a:solidFill>
+                <a:latin typeface="Calibri"/>
+              </a:rPr>
+              <a:t>Intake</a:t>
+            </a:r>
+          </a:p>
+        </p:txBody>
+      </p:sp>
+      <p:sp>
+        <p:nvSpPr>
+          <p:cNvPr id="17" name="TextBox 16"/>
+          <p:cNvSpPr txBox="1"/>
+          <p:nvPr/>
+        </p:nvSpPr>
+        <p:spPr>
+          <a:xfrm>
+            <a:off x="2596896" y="1417320"/>
+            <a:ext cx="694944" cy="182880"/>
+          </a:xfrm>
+          <a:prstGeom prst="rect">
+            <a:avLst/>
+          </a:prstGeom>
+          <a:noFill/>
+        </p:spPr>
+        <p:txBody>
+          <a:bodyPr wrap="square"/>
+          <a:lstStyle/>
+          <a:p>
+            <a:pPr algn="l"/>
+            <a:r>
+              <a:rPr sz="700" b="1" i="0">
+                <a:solidFill>
+                  <a:srgbClr val="C0392B"/>
+                </a:solidFill>
+                <a:latin typeface="Calibri"/>
+              </a:rPr>
+              <a:t>CRITICAL</a:t>
+            </a:r>
+          </a:p>
+        </p:txBody>
+      </p:sp>
+      <p:sp>
+        <p:nvSpPr>
+          <p:cNvPr id="18" name="TextBox 17"/>
+          <p:cNvSpPr txBox="1"/>
+          <p:nvPr/>
+        </p:nvSpPr>
+        <p:spPr>
+          <a:xfrm>
+            <a:off x="2596896" y="1591056"/>
+            <a:ext cx="694944" cy="237744"/>
+          </a:xfrm>
+          <a:prstGeom prst="rect">
+            <a:avLst/>
+          </a:prstGeom>
+          <a:noFill/>
+        </p:spPr>
+        <p:txBody>
+          <a:bodyPr wrap="square"/>
+          <a:lstStyle/>
+          <a:p>
+            <a:pPr algn="l"/>
+            <a:r>
+              <a:rPr sz="700" b="0" i="0">
+                <a:solidFill>
+                  <a:srgbClr val="8BADD0"/>
+                </a:solidFill>
+                <a:latin typeface="Calibri"/>
+              </a:rPr>
+              <a:t>2am calls to David</a:t>
+            </a:r>
+          </a:p>
+        </p:txBody>
+      </p:sp>
+      <p:sp>
+        <p:nvSpPr>
+          <p:cNvPr id="19" name="Rectangle 18"/>
+          <p:cNvSpPr/>
+          <p:nvPr/>
+        </p:nvSpPr>
+        <p:spPr>
+          <a:xfrm>
+            <a:off x="3401568" y="1005840"/>
+            <a:ext cx="804672" cy="164592"/>
+          </a:xfrm>
+          <a:prstGeom prst="rect">
+            <a:avLst/>
+          </a:prstGeom>
+          <a:solidFill>
+            <a:srgbClr val="C0392B"/>
+          </a:solidFill>
+          <a:ln>
+            <a:solidFill>
+              <a:srgbClr val="FFFFFF"/>
+            </a:solidFill>
+          </a:ln>
+        </p:spPr>
+        <p:style>
+          <a:lnRef idx="1">
+            <a:schemeClr val="accent1"/>
+          </a:lnRef>
+          <a:fillRef idx="3">
+            <a:schemeClr val="accent1"/>
+          </a:fillRef>
+          <a:effectRef idx="2">
+            <a:schemeClr val="accent1"/>
+          </a:effectRef>
+          <a:fontRef idx="minor">
+            <a:schemeClr val="lt1"/>
+          </a:fontRef>
+        </p:style>
+        <p:txBody>
+          <a:bodyPr rtlCol="0" anchor="ctr"/>
+          <a:lstStyle/>
+          <a:p>
+            <a:pPr algn="ctr"/>
+          </a:p>
+        </p:txBody>
+      </p:sp>
+      <p:sp>
+        <p:nvSpPr>
+          <p:cNvPr id="20" name="Rectangle 19"/>
+          <p:cNvSpPr/>
+          <p:nvPr/>
+        </p:nvSpPr>
+        <p:spPr>
+          <a:xfrm>
+            <a:off x="3401568" y="1170432"/>
+            <a:ext cx="804672" cy="676656"/>
+          </a:xfrm>
+          <a:prstGeom prst="rect">
+            <a:avLst/>
+          </a:prstGeom>
+          <a:solidFill>
+            <a:srgbClr val="162947"/>
+          </a:solidFill>
+          <a:ln>
+            <a:solidFill>
+              <a:srgbClr val="FFFFFF"/>
+            </a:solidFill>
+          </a:ln>
+        </p:spPr>
+        <p:style>
+          <a:lnRef idx="1">
+            <a:schemeClr val="accent1"/>
+          </a:lnRef>
+          <a:fillRef idx="3">
+            <a:schemeClr val="accent1"/>
+          </a:fillRef>
+          <a:effectRef idx="2">
+            <a:schemeClr val="accent1"/>
+          </a:effectRef>
+          <a:fontRef idx="minor">
+            <a:schemeClr val="lt1"/>
+          </a:fontRef>
+        </p:style>
+        <p:txBody>
+          <a:bodyPr rtlCol="0" anchor="ctr"/>
+          <a:lstStyle/>
+          <a:p>
+            <a:pPr algn="ctr"/>
+          </a:p>
+        </p:txBody>
+      </p:sp>
+      <p:sp>
+        <p:nvSpPr>
+          <p:cNvPr id="21" name="TextBox 20"/>
+          <p:cNvSpPr txBox="1"/>
+          <p:nvPr/>
+        </p:nvSpPr>
+        <p:spPr>
+          <a:xfrm>
+            <a:off x="3456432" y="1188720"/>
+            <a:ext cx="694944" cy="237744"/>
+          </a:xfrm>
+          <a:prstGeom prst="rect">
+            <a:avLst/>
+          </a:prstGeom>
+          <a:noFill/>
+        </p:spPr>
+        <p:txBody>
+          <a:bodyPr wrap="square"/>
+          <a:lstStyle/>
+          <a:p>
+            <a:pPr algn="l"/>
+            <a:r>
+              <a:rPr sz="800" b="1" i="0">
+                <a:solidFill>
+                  <a:srgbClr val="FFFFFF"/>
+                </a:solidFill>
+                <a:latin typeface="Calibri"/>
+              </a:rPr>
+              <a:t>Team</a:t>
+            </a:r>
+          </a:p>
+        </p:txBody>
+      </p:sp>
+      <p:sp>
+        <p:nvSpPr>
+          <p:cNvPr id="22" name="TextBox 21"/>
+          <p:cNvSpPr txBox="1"/>
+          <p:nvPr/>
+        </p:nvSpPr>
+        <p:spPr>
+          <a:xfrm>
+            <a:off x="3456432" y="1417320"/>
+            <a:ext cx="694944" cy="182880"/>
+          </a:xfrm>
+          <a:prstGeom prst="rect">
+            <a:avLst/>
+          </a:prstGeom>
+          <a:noFill/>
+        </p:spPr>
+        <p:txBody>
+          <a:bodyPr wrap="square"/>
+          <a:lstStyle/>
+          <a:p>
+            <a:pPr algn="l"/>
+            <a:r>
+              <a:rPr sz="700" b="1" i="0">
+                <a:solidFill>
+                  <a:srgbClr val="C0392B"/>
+                </a:solidFill>
+                <a:latin typeface="Calibri"/>
+              </a:rPr>
+              <a:t>CRITICAL</a:t>
+            </a:r>
+          </a:p>
+        </p:txBody>
+      </p:sp>
+      <p:sp>
+        <p:nvSpPr>
+          <p:cNvPr id="23" name="TextBox 22"/>
+          <p:cNvSpPr txBox="1"/>
+          <p:nvPr/>
+        </p:nvSpPr>
+        <p:spPr>
+          <a:xfrm>
+            <a:off x="3456432" y="1591056"/>
+            <a:ext cx="694944" cy="237744"/>
+          </a:xfrm>
+          <a:prstGeom prst="rect">
+            <a:avLst/>
+          </a:prstGeom>
+          <a:noFill/>
+        </p:spPr>
+        <p:txBody>
+          <a:bodyPr wrap="square"/>
+          <a:lstStyle/>
+          <a:p>
+            <a:pPr algn="l"/>
+            <a:r>
+              <a:rPr sz="700" b="0" i="0">
+                <a:solidFill>
+                  <a:srgbClr val="8BADD0"/>
+                </a:solidFill>
+                <a:latin typeface="Calibri"/>
+              </a:rPr>
+              <a:t>C/D team; no mgmt</a:t>
+            </a:r>
+          </a:p>
+        </p:txBody>
+      </p:sp>
+      <p:sp>
+        <p:nvSpPr>
+          <p:cNvPr id="24" name="Rectangle 23"/>
+          <p:cNvSpPr/>
+          <p:nvPr/>
+        </p:nvSpPr>
+        <p:spPr>
+          <a:xfrm>
+            <a:off x="4261104" y="1005840"/>
             <a:ext cx="804672" cy="164592"/>
           </a:xfrm>
           <a:prstGeom prst="rect">
@@ -3593,13 +3971,13 @@
       </p:sp>
       <p:sp>
         <p:nvSpPr>
-          <p:cNvPr id="15" name="Rectangle 14"/>
+          <p:cNvPr id="25" name="Rectangle 24"/>
           <p:cNvSpPr/>
           <p:nvPr/>
         </p:nvSpPr>
         <p:spPr>
           <a:xfrm>
-            <a:off x="2542032" y="1170432"/>
+            <a:off x="4261104" y="1170432"/>
             <a:ext cx="804672" cy="676656"/>
           </a:xfrm>
           <a:prstGeom prst="rect">
@@ -3638,384 +4016,6 @@
       </p:sp>
       <p:sp>
         <p:nvSpPr>
-          <p:cNvPr id="16" name="TextBox 15"/>
-          <p:cNvSpPr txBox="1"/>
-          <p:nvPr/>
-        </p:nvSpPr>
-        <p:spPr>
-          <a:xfrm>
-            <a:off x="2596896" y="1188720"/>
-            <a:ext cx="694944" cy="237744"/>
-          </a:xfrm>
-          <a:prstGeom prst="rect">
-            <a:avLst/>
-          </a:prstGeom>
-          <a:noFill/>
-        </p:spPr>
-        <p:txBody>
-          <a:bodyPr wrap="square"/>
-          <a:lstStyle/>
-          <a:p>
-            <a:pPr algn="l"/>
-            <a:r>
-              <a:rPr sz="800" b="1" i="0">
-                <a:solidFill>
-                  <a:srgbClr val="FFFFFF"/>
-                </a:solidFill>
-                <a:latin typeface="Calibri"/>
-              </a:rPr>
-              <a:t>Intake</a:t>
-            </a:r>
-          </a:p>
-        </p:txBody>
-      </p:sp>
-      <p:sp>
-        <p:nvSpPr>
-          <p:cNvPr id="17" name="TextBox 16"/>
-          <p:cNvSpPr txBox="1"/>
-          <p:nvPr/>
-        </p:nvSpPr>
-        <p:spPr>
-          <a:xfrm>
-            <a:off x="2596896" y="1417320"/>
-            <a:ext cx="694944" cy="182880"/>
-          </a:xfrm>
-          <a:prstGeom prst="rect">
-            <a:avLst/>
-          </a:prstGeom>
-          <a:noFill/>
-        </p:spPr>
-        <p:txBody>
-          <a:bodyPr wrap="square"/>
-          <a:lstStyle/>
-          <a:p>
-            <a:pPr algn="l"/>
-            <a:r>
-              <a:rPr sz="700" b="1" i="0">
-                <a:solidFill>
-                  <a:srgbClr val="D97706"/>
-                </a:solidFill>
-                <a:latin typeface="Calibri"/>
-              </a:rPr>
-              <a:t>IN PROGRESS</a:t>
-            </a:r>
-          </a:p>
-        </p:txBody>
-      </p:sp>
-      <p:sp>
-        <p:nvSpPr>
-          <p:cNvPr id="18" name="TextBox 17"/>
-          <p:cNvSpPr txBox="1"/>
-          <p:nvPr/>
-        </p:nvSpPr>
-        <p:spPr>
-          <a:xfrm>
-            <a:off x="2596896" y="1591056"/>
-            <a:ext cx="694944" cy="237744"/>
-          </a:xfrm>
-          <a:prstGeom prst="rect">
-            <a:avLst/>
-          </a:prstGeom>
-          <a:noFill/>
-        </p:spPr>
-        <p:txBody>
-          <a:bodyPr wrap="square"/>
-          <a:lstStyle/>
-          <a:p>
-            <a:pPr algn="l"/>
-            <a:r>
-              <a:rPr sz="700" b="0" i="0">
-                <a:solidFill>
-                  <a:srgbClr val="8BADD0"/>
-                </a:solidFill>
-                <a:latin typeface="Calibri"/>
-              </a:rPr>
-              <a:t>Form buried, no chat</a:t>
-            </a:r>
-          </a:p>
-        </p:txBody>
-      </p:sp>
-      <p:sp>
-        <p:nvSpPr>
-          <p:cNvPr id="19" name="Rectangle 18"/>
-          <p:cNvSpPr/>
-          <p:nvPr/>
-        </p:nvSpPr>
-        <p:spPr>
-          <a:xfrm>
-            <a:off x="3401568" y="1005840"/>
-            <a:ext cx="804672" cy="164592"/>
-          </a:xfrm>
-          <a:prstGeom prst="rect">
-            <a:avLst/>
-          </a:prstGeom>
-          <a:solidFill>
-            <a:srgbClr val="D97706"/>
-          </a:solidFill>
-          <a:ln>
-            <a:solidFill>
-              <a:srgbClr val="FFFFFF"/>
-            </a:solidFill>
-          </a:ln>
-        </p:spPr>
-        <p:style>
-          <a:lnRef idx="1">
-            <a:schemeClr val="accent1"/>
-          </a:lnRef>
-          <a:fillRef idx="3">
-            <a:schemeClr val="accent1"/>
-          </a:fillRef>
-          <a:effectRef idx="2">
-            <a:schemeClr val="accent1"/>
-          </a:effectRef>
-          <a:fontRef idx="minor">
-            <a:schemeClr val="lt1"/>
-          </a:fontRef>
-        </p:style>
-        <p:txBody>
-          <a:bodyPr rtlCol="0" anchor="ctr"/>
-          <a:lstStyle/>
-          <a:p>
-            <a:pPr algn="ctr"/>
-          </a:p>
-        </p:txBody>
-      </p:sp>
-      <p:sp>
-        <p:nvSpPr>
-          <p:cNvPr id="20" name="Rectangle 19"/>
-          <p:cNvSpPr/>
-          <p:nvPr/>
-        </p:nvSpPr>
-        <p:spPr>
-          <a:xfrm>
-            <a:off x="3401568" y="1170432"/>
-            <a:ext cx="804672" cy="676656"/>
-          </a:xfrm>
-          <a:prstGeom prst="rect">
-            <a:avLst/>
-          </a:prstGeom>
-          <a:solidFill>
-            <a:srgbClr val="162947"/>
-          </a:solidFill>
-          <a:ln>
-            <a:solidFill>
-              <a:srgbClr val="FFFFFF"/>
-            </a:solidFill>
-          </a:ln>
-        </p:spPr>
-        <p:style>
-          <a:lnRef idx="1">
-            <a:schemeClr val="accent1"/>
-          </a:lnRef>
-          <a:fillRef idx="3">
-            <a:schemeClr val="accent1"/>
-          </a:fillRef>
-          <a:effectRef idx="2">
-            <a:schemeClr val="accent1"/>
-          </a:effectRef>
-          <a:fontRef idx="minor">
-            <a:schemeClr val="lt1"/>
-          </a:fontRef>
-        </p:style>
-        <p:txBody>
-          <a:bodyPr rtlCol="0" anchor="ctr"/>
-          <a:lstStyle/>
-          <a:p>
-            <a:pPr algn="ctr"/>
-          </a:p>
-        </p:txBody>
-      </p:sp>
-      <p:sp>
-        <p:nvSpPr>
-          <p:cNvPr id="21" name="TextBox 20"/>
-          <p:cNvSpPr txBox="1"/>
-          <p:nvPr/>
-        </p:nvSpPr>
-        <p:spPr>
-          <a:xfrm>
-            <a:off x="3456432" y="1188720"/>
-            <a:ext cx="694944" cy="237744"/>
-          </a:xfrm>
-          <a:prstGeom prst="rect">
-            <a:avLst/>
-          </a:prstGeom>
-          <a:noFill/>
-        </p:spPr>
-        <p:txBody>
-          <a:bodyPr wrap="square"/>
-          <a:lstStyle/>
-          <a:p>
-            <a:pPr algn="l"/>
-            <a:r>
-              <a:rPr sz="800" b="1" i="0">
-                <a:solidFill>
-                  <a:srgbClr val="FFFFFF"/>
-                </a:solidFill>
-                <a:latin typeface="Calibri"/>
-              </a:rPr>
-              <a:t>Team</a:t>
-            </a:r>
-          </a:p>
-        </p:txBody>
-      </p:sp>
-      <p:sp>
-        <p:nvSpPr>
-          <p:cNvPr id="22" name="TextBox 21"/>
-          <p:cNvSpPr txBox="1"/>
-          <p:nvPr/>
-        </p:nvSpPr>
-        <p:spPr>
-          <a:xfrm>
-            <a:off x="3456432" y="1417320"/>
-            <a:ext cx="694944" cy="182880"/>
-          </a:xfrm>
-          <a:prstGeom prst="rect">
-            <a:avLst/>
-          </a:prstGeom>
-          <a:noFill/>
-        </p:spPr>
-        <p:txBody>
-          <a:bodyPr wrap="square"/>
-          <a:lstStyle/>
-          <a:p>
-            <a:pPr algn="l"/>
-            <a:r>
-              <a:rPr sz="700" b="1" i="0">
-                <a:solidFill>
-                  <a:srgbClr val="D97706"/>
-                </a:solidFill>
-                <a:latin typeface="Calibri"/>
-              </a:rPr>
-              <a:t>IN PROGRESS</a:t>
-            </a:r>
-          </a:p>
-        </p:txBody>
-      </p:sp>
-      <p:sp>
-        <p:nvSpPr>
-          <p:cNvPr id="23" name="TextBox 22"/>
-          <p:cNvSpPr txBox="1"/>
-          <p:nvPr/>
-        </p:nvSpPr>
-        <p:spPr>
-          <a:xfrm>
-            <a:off x="3456432" y="1591056"/>
-            <a:ext cx="694944" cy="237744"/>
-          </a:xfrm>
-          <a:prstGeom prst="rect">
-            <a:avLst/>
-          </a:prstGeom>
-          <a:noFill/>
-        </p:spPr>
-        <p:txBody>
-          <a:bodyPr wrap="square"/>
-          <a:lstStyle/>
-          <a:p>
-            <a:pPr algn="l"/>
-            <a:r>
-              <a:rPr sz="700" b="0" i="0">
-                <a:solidFill>
-                  <a:srgbClr val="8BADD0"/>
-                </a:solidFill>
-                <a:latin typeface="Calibri"/>
-              </a:rPr>
-              <a:t>No mgmt layer yet</a:t>
-            </a:r>
-          </a:p>
-        </p:txBody>
-      </p:sp>
-      <p:sp>
-        <p:nvSpPr>
-          <p:cNvPr id="24" name="Rectangle 23"/>
-          <p:cNvSpPr/>
-          <p:nvPr/>
-        </p:nvSpPr>
-        <p:spPr>
-          <a:xfrm>
-            <a:off x="4261104" y="1005840"/>
-            <a:ext cx="804672" cy="164592"/>
-          </a:xfrm>
-          <a:prstGeom prst="rect">
-            <a:avLst/>
-          </a:prstGeom>
-          <a:solidFill>
-            <a:srgbClr val="D97706"/>
-          </a:solidFill>
-          <a:ln>
-            <a:solidFill>
-              <a:srgbClr val="FFFFFF"/>
-            </a:solidFill>
-          </a:ln>
-        </p:spPr>
-        <p:style>
-          <a:lnRef idx="1">
-            <a:schemeClr val="accent1"/>
-          </a:lnRef>
-          <a:fillRef idx="3">
-            <a:schemeClr val="accent1"/>
-          </a:fillRef>
-          <a:effectRef idx="2">
-            <a:schemeClr val="accent1"/>
-          </a:effectRef>
-          <a:fontRef idx="minor">
-            <a:schemeClr val="lt1"/>
-          </a:fontRef>
-        </p:style>
-        <p:txBody>
-          <a:bodyPr rtlCol="0" anchor="ctr"/>
-          <a:lstStyle/>
-          <a:p>
-            <a:pPr algn="ctr"/>
-          </a:p>
-        </p:txBody>
-      </p:sp>
-      <p:sp>
-        <p:nvSpPr>
-          <p:cNvPr id="25" name="Rectangle 24"/>
-          <p:cNvSpPr/>
-          <p:nvPr/>
-        </p:nvSpPr>
-        <p:spPr>
-          <a:xfrm>
-            <a:off x="4261104" y="1170432"/>
-            <a:ext cx="804672" cy="676656"/>
-          </a:xfrm>
-          <a:prstGeom prst="rect">
-            <a:avLst/>
-          </a:prstGeom>
-          <a:solidFill>
-            <a:srgbClr val="162947"/>
-          </a:solidFill>
-          <a:ln>
-            <a:solidFill>
-              <a:srgbClr val="FFFFFF"/>
-            </a:solidFill>
-          </a:ln>
-        </p:spPr>
-        <p:style>
-          <a:lnRef idx="1">
-            <a:schemeClr val="accent1"/>
-          </a:lnRef>
-          <a:fillRef idx="3">
-            <a:schemeClr val="accent1"/>
-          </a:fillRef>
-          <a:effectRef idx="2">
-            <a:schemeClr val="accent1"/>
-          </a:effectRef>
-          <a:fontRef idx="minor">
-            <a:schemeClr val="lt1"/>
-          </a:fontRef>
-        </p:style>
-        <p:txBody>
-          <a:bodyPr rtlCol="0" anchor="ctr"/>
-          <a:lstStyle/>
-          <a:p>
-            <a:pPr algn="ctr"/>
-          </a:p>
-        </p:txBody>
-      </p:sp>
-      <p:sp>
-        <p:nvSpPr>
           <p:cNvPr id="26" name="TextBox 25"/>
           <p:cNvSpPr txBox="1"/>
           <p:nvPr/>
@@ -4075,7 +4075,7 @@
                 </a:solidFill>
                 <a:latin typeface="Calibri"/>
               </a:rPr>
-              <a:t>IN PROGRESS</a:t>
+              <a:t>AT RISK</a:t>
             </a:r>
           </a:p>
         </p:txBody>
@@ -4108,7 +4108,7 @@
                 </a:solidFill>
                 <a:latin typeface="Calibri"/>
               </a:rPr>
-              <a:t>Revenue unconfirmed</a:t>
+              <a:t>$15K–$70K swing</a:t>
             </a:r>
           </a:p>
         </p:txBody>
@@ -4297,7 +4297,7 @@
                 </a:solidFill>
                 <a:latin typeface="Calibri"/>
               </a:rPr>
-              <a:t>No Google Ads or LSA — Sevens Legal captures every emergency search</a:t>
+              <a:t>Website TLS error sends a security warning to every referral click — blocking leads before they see David's credentials.</a:t>
             </a:r>
           </a:p>
         </p:txBody>
@@ -4453,7 +4453,7 @@
                 </a:solidFill>
                 <a:latin typeface="Calibri"/>
               </a:rPr>
-              <a:t>davidshapiro.com leads to a Baltimore attorney — active lead loss</a:t>
+              <a:t>Intake depends entirely on David — including 2 a.m. emergency calls — with no process, no backup, and weekend cases being missed.</a:t>
             </a:r>
           </a:p>
         </p:txBody>
@@ -4609,7 +4609,7 @@
                 </a:solidFill>
                 <a:latin typeface="Calibri"/>
               </a:rPr>
-              <a:t>Contact form buried below fold, no after-hours response path</a:t>
+              <a:t>A self-described 'C or D team' with no management layer — 80% of David's work is delegable but there is no one to delegate to.</a:t>
             </a:r>
           </a:p>
         </p:txBody>
@@ -4765,7 +4765,7 @@
                 </a:solidFill>
                 <a:latin typeface="Calibri"/>
               </a:rPr>
-              <a:t>4.9 Google stars · 12x Super Lawyers · BBB Torch Award — elite reputation</a:t>
+              <a:t>38 years of practice, a US Supreme Court victory, and 150 active PI cases already in the pipeline — unmatched Baltimore credentials.</a:t>
             </a:r>
           </a:p>
         </p:txBody>
@@ -4966,7 +4966,7 @@
                 </a:solidFill>
                 <a:latin typeface="Calibri"/>
               </a:rPr>
-              <a:t>Stage 4: Small Business Manager  →  Goal: Stage 6, Law Firm Owner</a:t>
+              <a:t>Stage 3: Solo Practitioner  →  Goal: Stage 5, Law Firm CEO</a:t>
             </a:r>
           </a:p>
         </p:txBody>
@@ -5077,7 +5077,7 @@
                 </a:solidFill>
                 <a:latin typeface="Calibri"/>
               </a:rPr>
-              <a:t>Sevens Legal, APC</a:t>
+              <a:t>Hassan, Hassan &amp; Tuchman</a:t>
             </a:r>
           </a:p>
         </p:txBody>
@@ -5110,7 +5110,7 @@
                 </a:solidFill>
                 <a:latin typeface="Calibri"/>
               </a:rPr>
-              <a:t>800+ reviews</a:t>
+              <a:t>385 reviews</a:t>
             </a:r>
           </a:p>
         </p:txBody>
@@ -5143,7 +5143,7 @@
                 </a:solidFill>
                 <a:latin typeface="Calibri"/>
               </a:rPr>
-              <a:t>SD Best Criminal &amp; DUI 2024</a:t>
+              <a:t>4.9 ★ · PI dominant</a:t>
             </a:r>
           </a:p>
         </p:txBody>
@@ -5221,7 +5221,7 @@
                 </a:solidFill>
                 <a:latin typeface="Calibri"/>
               </a:rPr>
-              <a:t>Dod Law, APC</a:t>
+              <a:t>Seth Okin</a:t>
             </a:r>
           </a:p>
         </p:txBody>
@@ -5254,7 +5254,7 @@
                 </a:solidFill>
                 <a:latin typeface="Calibri"/>
               </a:rPr>
-              <a:t>5.0 stars</a:t>
+              <a:t>212 reviews</a:t>
             </a:r>
           </a:p>
         </p:txBody>
@@ -5287,7 +5287,7 @@
                 </a:solidFill>
                 <a:latin typeface="Calibri"/>
               </a:rPr>
-              <a:t>2023 Trial Lawyer of the Year</a:t>
+              <a:t>5.0 ★ · AVVO 10.0</a:t>
             </a:r>
           </a:p>
         </p:txBody>
@@ -5365,7 +5365,7 @@
                 </a:solidFill>
                 <a:latin typeface="Calibri"/>
               </a:rPr>
-              <a:t>sandiegoduilawyers.com</a:t>
+              <a:t>Greenberg Law Offices</a:t>
             </a:r>
           </a:p>
         </p:txBody>
@@ -5398,7 +5398,7 @@
                 </a:solidFill>
                 <a:latin typeface="Calibri"/>
               </a:rPr>
-              <a:t>N/A</a:t>
+              <a:t>60+ yrs</a:t>
             </a:r>
           </a:p>
         </p:txBody>
@@ -5431,7 +5431,7 @@
                 </a:solidFill>
                 <a:latin typeface="Calibri"/>
               </a:rPr>
-              <a:t>Dedicated DUI PPC capture funnel</a:t>
+              <a:t>Top 5 PI MD 2026</a:t>
             </a:r>
           </a:p>
         </p:txBody>
@@ -5587,7 +5587,7 @@
                 </a:solidFill>
                 <a:latin typeface="Calibri"/>
               </a:rPr>
-              <a:t>~204 Google reviews</a:t>
+              <a:t>85 reviews</a:t>
             </a:r>
           </a:p>
         </p:txBody>
@@ -5884,7 +5884,7 @@
                 </a:solidFill>
                 <a:latin typeface="Calibri"/>
               </a:rPr>
-              <a:t>Your Growth Plan: 3 Priorities to Become San Diego's #1</a:t>
+              <a:t>Your Growth Plan: 3 Priorities to Reach $100,000/Month</a:t>
             </a:r>
           </a:p>
         </p:txBody>
@@ -6040,7 +6040,7 @@
                 </a:solidFill>
                 <a:latin typeface="Calibri"/>
               </a:rPr>
-              <a:t>Lead Generation, Intake, Team, and Profit — all four must work together. When they do, David P. Shapiro becomes the recognized #1 criminal defense firm in San Diego County and the firm runs on systems, not on him alone.</a:t>
+              <a:t>The SMB Model builds Lead Generation, Intake, Team, and Profit so all four pillars work together — not just one at a time. When all four work, David can step back, trust the firm runs, and finally have the time to build what he has been putting off.</a:t>
             </a:r>
           </a:p>
         </p:txBody>
@@ -6118,7 +6118,7 @@
                 </a:solidFill>
                 <a:latin typeface="Calibri"/>
               </a:rPr>
-              <a:t>Est. $500K → $1M+ revenue</a:t>
+              <a:t>$47K avg → $100K/month</a:t>
             </a:r>
           </a:p>
         </p:txBody>
@@ -6151,7 +6151,7 @@
                 </a:solidFill>
                 <a:latin typeface="Calibri"/>
               </a:rPr>
-              <a:t>Recognized #1 in San Diego</a:t>
+              <a:t>Maine home. Restaurant. Freedom.</a:t>
             </a:r>
           </a:p>
         </p:txBody>
@@ -6418,7 +6418,7 @@
                 </a:solidFill>
                 <a:latin typeface="Calibri"/>
               </a:rPr>
-              <a:t>Turn Google into a criminal case pipeline</a:t>
+              <a:t>Fix TLS cert — stop turning referrals away</a:t>
             </a:r>
           </a:p>
         </p:txBody>
@@ -6541,7 +6541,7 @@
                 </a:solidFill>
                 <a:latin typeface="Calibri"/>
               </a:rPr>
-              <a:t>Activate LSA — pay per lead, not per click</a:t>
+              <a:t>Launch Google Ads for PI + CD in Baltimore</a:t>
             </a:r>
           </a:p>
         </p:txBody>
@@ -6664,7 +6664,7 @@
                 </a:solidFill>
                 <a:latin typeface="Calibri"/>
               </a:rPr>
-              <a:t>Fix dead domain, recover lost referrals now</a:t>
+              <a:t>Enroll in LSA — earn Google Screened badge</a:t>
             </a:r>
           </a:p>
         </p:txBody>
@@ -6787,7 +6787,7 @@
                 </a:solidFill>
                 <a:latin typeface="Calibri"/>
               </a:rPr>
-              <a:t>Meta retargeting converts visitors who didn't call</a:t>
+              <a:t>Build review pipeline toward 300+ Google reviews</a:t>
             </a:r>
           </a:p>
         </p:txBody>
@@ -6910,7 +6910,7 @@
                 </a:solidFill>
                 <a:latin typeface="Calibri"/>
               </a:rPr>
-              <a:t>Close the 4:1 review gap with Sevens Legal</a:t>
+              <a:t>Make digital presence a 24/7 lead engine</a:t>
             </a:r>
           </a:p>
         </p:txBody>
@@ -7177,7 +7177,7 @@
                 </a:solidFill>
                 <a:latin typeface="Calibri"/>
               </a:rPr>
-              <a:t>Add above-fold capture to the homepage</a:t>
+              <a:t>End 2 a.m. calls going to David personally</a:t>
             </a:r>
           </a:p>
         </p:txBody>
@@ -7300,7 +7300,7 @@
                 </a:solidFill>
                 <a:latin typeface="Calibri"/>
               </a:rPr>
-              <a:t>Install after-hours response for 2am arrests</a:t>
+              <a:t>Install after-hours coverage for CD + DUI</a:t>
             </a:r>
           </a:p>
         </p:txBody>
@@ -7423,7 +7423,7 @@
                 </a:solidFill>
                 <a:latin typeface="Calibri"/>
               </a:rPr>
-              <a:t>Track every lead: source, speed, close rate</a:t>
+              <a:t>Define follow-up cadence for every inquiry</a:t>
             </a:r>
           </a:p>
         </p:txBody>
@@ -7546,7 +7546,7 @@
                 </a:solidFill>
                 <a:latin typeface="Calibri"/>
               </a:rPr>
-              <a:t>Cut response time — first to answer wins</a:t>
+              <a:t>Hire and train a dedicated intake specialist</a:t>
             </a:r>
           </a:p>
         </p:txBody>
@@ -7669,7 +7669,7 @@
                 </a:solidFill>
                 <a:latin typeface="Calibri"/>
               </a:rPr>
-              <a:t>Convert more leads already earned by reputation</a:t>
+              <a:t>Convert more of the 150 PI cases in pipeline</a:t>
             </a:r>
           </a:p>
         </p:txBody>
@@ -7936,7 +7936,7 @@
                 </a:solidFill>
                 <a:latin typeface="Calibri"/>
               </a:rPr>
-              <a:t>Build a management layer below David</a:t>
+              <a:t>Replace C/D team with a capable A team</a:t>
             </a:r>
           </a:p>
         </p:txBody>
@@ -8059,7 +8059,7 @@
                 </a:solidFill>
                 <a:latin typeface="Calibri"/>
               </a:rPr>
-              <a:t>Track revenue and margin by practice area</a:t>
+              <a:t>Delegate 80% of David's tasks to trained staff</a:t>
             </a:r>
           </a:p>
         </p:txBody>
@@ -8182,7 +8182,7 @@
                 </a:solidFill>
                 <a:latin typeface="Calibri"/>
               </a:rPr>
-              <a:t>Elevate Partner Molea to operational lead</a:t>
+              <a:t>Weekly accountability structure for every role</a:t>
             </a:r>
           </a:p>
         </p:txBody>
@@ -8305,7 +8305,7 @@
                 </a:solidFill>
                 <a:latin typeface="Calibri"/>
               </a:rPr>
-              <a:t>Establish KPIs and weekly team accountability</a:t>
+              <a:t>Track revenue by case type — PI, CD, and other</a:t>
             </a:r>
           </a:p>
         </p:txBody>
@@ -8428,7 +8428,7 @@
                 </a:solidFill>
                 <a:latin typeface="Calibri"/>
               </a:rPr>
-              <a:t>Know your profit — not just your revenue</a:t>
+              <a:t>Build profit plan tied to $100K/month + Maine</a:t>
             </a:r>
           </a:p>
         </p:txBody>
@@ -8992,7 +8992,7 @@
                 </a:solidFill>
                 <a:latin typeface="Calibri"/>
               </a:rPr>
-              <a:t>Google Ads · LSA · Meta Ads · SEO · Website CRO</a:t>
+              <a:t>Website rebuild · Google Ads · LSA · GBP · Reviews</a:t>
             </a:r>
           </a:p>
         </p:txBody>
@@ -9292,7 +9292,7 @@
                 </a:solidFill>
                 <a:latin typeface="Calibri"/>
               </a:rPr>
-              <a:t>Weekly coaching · Masterminds · Workshops · Annual event</a:t>
+              <a:t>Weekly coaching · PI/CD masterminds · Intake systems</a:t>
             </a:r>
           </a:p>
         </p:txBody>
@@ -9514,7 +9514,7 @@
                 </a:solidFill>
                 <a:latin typeface="Calibri"/>
               </a:rPr>
-              <a:t>+ Recommended ad spend: $5,500–$22,000/mo paid directly to Google/Meta</a:t>
+              <a:t>+ Recommended ad spend: $7,500–$25,000/mo paid directly to Google/Meta</a:t>
             </a:r>
           </a:p>
         </p:txBody>
@@ -9658,7 +9658,7 @@
                 </a:solidFill>
                 <a:latin typeface="Calibri"/>
               </a:rPr>
-              <a:t>$4,000</a:t>
+              <a:t>$6,500</a:t>
             </a:r>
           </a:p>
         </p:txBody>
@@ -9736,7 +9736,7 @@
                 </a:solidFill>
                 <a:latin typeface="Calibri"/>
               </a:rPr>
-              <a:t>Conservative  (2–3 cases/mo):</a:t>
+              <a:t>Conservative  (3 cases/mo):</a:t>
             </a:r>
           </a:p>
         </p:txBody>
@@ -9769,7 +9769,7 @@
                 </a:solidFill>
                 <a:latin typeface="Calibri"/>
               </a:rPr>
-              <a:t>$10,000 revenue · 1.8× ROAS</a:t>
+              <a:t>$23,000 revenue · 3.1× ROAS</a:t>
             </a:r>
           </a:p>
         </p:txBody>
@@ -9802,7 +9802,7 @@
                 </a:solidFill>
                 <a:latin typeface="Calibri"/>
               </a:rPr>
-              <a:t>Aggressive  (12–13 cases/mo):</a:t>
+              <a:t>Aggressive  (15 cases/mo):</a:t>
             </a:r>
           </a:p>
         </p:txBody>
@@ -9835,7 +9835,7 @@
                 </a:solidFill>
                 <a:latin typeface="Calibri"/>
               </a:rPr>
-              <a:t>$52,000 revenue · 2.4× ROAS</a:t>
+              <a:t>$97,500 revenue · 3.9× ROAS</a:t>
             </a:r>
           </a:p>
         </p:txBody>
@@ -9979,7 +9979,7 @@
                 </a:solidFill>
                 <a:latin typeface="Calibri"/>
               </a:rPr>
-              <a:t>Coaching kickoff + onboarding begins</a:t>
+              <a:t>Coaching kickoff — intake metrics and priorities set</a:t>
             </a:r>
           </a:p>
         </p:txBody>
@@ -10090,7 +10090,7 @@
                 </a:solidFill>
                 <a:latin typeface="Calibri"/>
               </a:rPr>
-              <a:t>Google Ads + LSA campaigns go live</a:t>
+              <a:t>Website TLS fix and rebuild initiated</a:t>
             </a:r>
           </a:p>
         </p:txBody>
@@ -10168,7 +10168,7 @@
                 </a:solidFill>
                 <a:latin typeface="Calibri"/>
               </a:rPr>
-              <a:t>Week 2</a:t>
+              <a:t>Week 3</a:t>
             </a:r>
           </a:p>
         </p:txBody>
@@ -10201,7 +10201,7 @@
                 </a:solidFill>
                 <a:latin typeface="Calibri"/>
               </a:rPr>
-              <a:t>Meta retargeting campaign launches</a:t>
+              <a:t>Google Ads and LSA go live in Baltimore</a:t>
             </a:r>
           </a:p>
         </p:txBody>
@@ -10279,7 +10279,7 @@
                 </a:solidFill>
                 <a:latin typeface="Calibri"/>
               </a:rPr>
-              <a:t>Week 3</a:t>
+              <a:t>Month 1</a:t>
             </a:r>
           </a:p>
         </p:txBody>
@@ -10312,7 +10312,7 @@
                 </a:solidFill>
                 <a:latin typeface="Calibri"/>
               </a:rPr>
-              <a:t>Homepage capture + after-hours intake live</a:t>
+              <a:t>After-hours intake protocol established</a:t>
             </a:r>
           </a:p>
         </p:txBody>
@@ -10423,7 +10423,7 @@
                 </a:solidFill>
                 <a:latin typeface="Calibri"/>
               </a:rPr>
-              <a:t>Review gen: 15–30 new Google reviews/month</a:t>
+              <a:t>Review campaign active; team accountability live</a:t>
             </a:r>
           </a:p>
         </p:txBody>
@@ -10501,7 +10501,7 @@
                 </a:solidFill>
                 <a:latin typeface="Calibri"/>
               </a:rPr>
-              <a:t>"16 years of building something exceptional — now it's time to make sure San Diego sees it the moment they need help."</a:t>
+              <a:t>"When the firm runs without me, I can finally go to Maine — and start building the restaurant I have been putting off for years."</a:t>
             </a:r>
           </a:p>
         </p:txBody>
